--- a/slides/Week3_Recap.pptx
+++ b/slides/Week3_Recap.pptx
@@ -186,7 +186,7 @@
 <file path=ppt/revisionInfo.xml><?xml version="1.0" encoding="utf-8"?>
 <p1510:revInfo xmlns:a="http://schemas.openxmlformats.org/drawingml/2006/main" xmlns:r="http://schemas.openxmlformats.org/officeDocument/2006/relationships" xmlns:p1510="http://schemas.microsoft.com/office/powerpoint/2015/10/main">
   <p1510:revLst>
-    <p1510:client id="{1899A2C2-5F40-49C0-91B8-D333C4623443}" v="34" dt="2026-02-03T01:39:37.685"/>
+    <p1510:client id="{1899A2C2-5F40-49C0-91B8-D333C4623443}" v="37" dt="2026-02-03T04:06:16.253"/>
     <p1510:client id="{CE7FE764-8D5C-4BE1-A510-351B4C519FFC}" v="164" dt="2026-02-02T04:55:14.239"/>
   </p1510:revLst>
 </p1510:revInfo>
@@ -197,12 +197,12 @@
   <pc:docChgLst>
     <pc:chgData name="Zhao Jin" userId="cd05a825-544c-438a-9ba1-08e63db50b47" providerId="ADAL" clId="{5DF3A229-1965-414E-AF54-F4C37AC7DF68}"/>
     <pc:docChg chg="custSel modSld">
-      <pc:chgData name="Zhao Jin" userId="cd05a825-544c-438a-9ba1-08e63db50b47" providerId="ADAL" clId="{5DF3A229-1965-414E-AF54-F4C37AC7DF68}" dt="2026-02-03T01:39:37.685" v="113"/>
+      <pc:chgData name="Zhao Jin" userId="cd05a825-544c-438a-9ba1-08e63db50b47" providerId="ADAL" clId="{5DF3A229-1965-414E-AF54-F4C37AC7DF68}" dt="2026-02-03T04:06:16.253" v="140"/>
       <pc:docMkLst>
         <pc:docMk/>
       </pc:docMkLst>
       <pc:sldChg chg="addSp modSp mod addAnim delAnim modAnim">
-        <pc:chgData name="Zhao Jin" userId="cd05a825-544c-438a-9ba1-08e63db50b47" providerId="ADAL" clId="{5DF3A229-1965-414E-AF54-F4C37AC7DF68}" dt="2026-02-03T01:39:37.685" v="113"/>
+        <pc:chgData name="Zhao Jin" userId="cd05a825-544c-438a-9ba1-08e63db50b47" providerId="ADAL" clId="{5DF3A229-1965-414E-AF54-F4C37AC7DF68}" dt="2026-02-03T04:05:26.633" v="114" actId="207"/>
         <pc:sldMkLst>
           <pc:docMk/>
           <pc:sldMk cId="4227920544" sldId="550"/>
@@ -221,6 +221,14 @@
             <pc:docMk/>
             <pc:sldMk cId="4227920544" sldId="550"/>
             <ac:spMk id="7" creationId="{75F748EA-BC51-B2E6-222D-8317B7DF7870}"/>
+          </ac:spMkLst>
+        </pc:spChg>
+        <pc:spChg chg="mod">
+          <ac:chgData name="Zhao Jin" userId="cd05a825-544c-438a-9ba1-08e63db50b47" providerId="ADAL" clId="{5DF3A229-1965-414E-AF54-F4C37AC7DF68}" dt="2026-02-03T04:05:26.633" v="114" actId="207"/>
+          <ac:spMkLst>
+            <pc:docMk/>
+            <pc:sldMk cId="4227920544" sldId="550"/>
+            <ac:spMk id="9" creationId="{00000000-0000-0000-0000-000000000000}"/>
           </ac:spMkLst>
         </pc:spChg>
         <pc:spChg chg="add mod">
@@ -308,6 +316,66 @@
             <pc:docMk/>
             <pc:sldMk cId="3404136433" sldId="551"/>
             <ac:spMk id="9" creationId="{00000000-0000-0000-0000-000000000000}"/>
+          </ac:spMkLst>
+        </pc:spChg>
+      </pc:sldChg>
+      <pc:sldChg chg="modSp mod">
+        <pc:chgData name="Zhao Jin" userId="cd05a825-544c-438a-9ba1-08e63db50b47" providerId="ADAL" clId="{5DF3A229-1965-414E-AF54-F4C37AC7DF68}" dt="2026-02-03T04:06:06.782" v="137" actId="20577"/>
+        <pc:sldMkLst>
+          <pc:docMk/>
+          <pc:sldMk cId="222951515" sldId="553"/>
+        </pc:sldMkLst>
+        <pc:spChg chg="mod">
+          <ac:chgData name="Zhao Jin" userId="cd05a825-544c-438a-9ba1-08e63db50b47" providerId="ADAL" clId="{5DF3A229-1965-414E-AF54-F4C37AC7DF68}" dt="2026-02-03T04:06:06.782" v="137" actId="20577"/>
+          <ac:spMkLst>
+            <pc:docMk/>
+            <pc:sldMk cId="222951515" sldId="553"/>
+            <ac:spMk id="4" creationId="{D3E425E8-2ED5-4C78-052D-AE23C03B4233}"/>
+          </ac:spMkLst>
+        </pc:spChg>
+      </pc:sldChg>
+      <pc:sldChg chg="modSp">
+        <pc:chgData name="Zhao Jin" userId="cd05a825-544c-438a-9ba1-08e63db50b47" providerId="ADAL" clId="{5DF3A229-1965-414E-AF54-F4C37AC7DF68}" dt="2026-02-03T04:06:12.067" v="138"/>
+        <pc:sldMkLst>
+          <pc:docMk/>
+          <pc:sldMk cId="2043253325" sldId="557"/>
+        </pc:sldMkLst>
+        <pc:spChg chg="mod">
+          <ac:chgData name="Zhao Jin" userId="cd05a825-544c-438a-9ba1-08e63db50b47" providerId="ADAL" clId="{5DF3A229-1965-414E-AF54-F4C37AC7DF68}" dt="2026-02-03T04:06:12.067" v="138"/>
+          <ac:spMkLst>
+            <pc:docMk/>
+            <pc:sldMk cId="2043253325" sldId="557"/>
+            <ac:spMk id="4" creationId="{6A6CB5F1-204E-C8FC-B8B7-D98DF4C867E5}"/>
+          </ac:spMkLst>
+        </pc:spChg>
+      </pc:sldChg>
+      <pc:sldChg chg="modSp">
+        <pc:chgData name="Zhao Jin" userId="cd05a825-544c-438a-9ba1-08e63db50b47" providerId="ADAL" clId="{5DF3A229-1965-414E-AF54-F4C37AC7DF68}" dt="2026-02-03T04:06:14.187" v="139"/>
+        <pc:sldMkLst>
+          <pc:docMk/>
+          <pc:sldMk cId="2893852573" sldId="558"/>
+        </pc:sldMkLst>
+        <pc:spChg chg="mod">
+          <ac:chgData name="Zhao Jin" userId="cd05a825-544c-438a-9ba1-08e63db50b47" providerId="ADAL" clId="{5DF3A229-1965-414E-AF54-F4C37AC7DF68}" dt="2026-02-03T04:06:14.187" v="139"/>
+          <ac:spMkLst>
+            <pc:docMk/>
+            <pc:sldMk cId="2893852573" sldId="558"/>
+            <ac:spMk id="4" creationId="{7C703F2F-2BA5-2C0A-0D40-11F3C3C134F5}"/>
+          </ac:spMkLst>
+        </pc:spChg>
+      </pc:sldChg>
+      <pc:sldChg chg="modSp">
+        <pc:chgData name="Zhao Jin" userId="cd05a825-544c-438a-9ba1-08e63db50b47" providerId="ADAL" clId="{5DF3A229-1965-414E-AF54-F4C37AC7DF68}" dt="2026-02-03T04:06:16.253" v="140"/>
+        <pc:sldMkLst>
+          <pc:docMk/>
+          <pc:sldMk cId="2199886267" sldId="559"/>
+        </pc:sldMkLst>
+        <pc:spChg chg="mod">
+          <ac:chgData name="Zhao Jin" userId="cd05a825-544c-438a-9ba1-08e63db50b47" providerId="ADAL" clId="{5DF3A229-1965-414E-AF54-F4C37AC7DF68}" dt="2026-02-03T04:06:16.253" v="140"/>
+          <ac:spMkLst>
+            <pc:docMk/>
+            <pc:sldMk cId="2199886267" sldId="559"/>
+            <ac:spMk id="4" creationId="{4BE12F9B-CE78-AFBC-0047-EBCE89C5B64D}"/>
           </ac:spMkLst>
         </pc:spChg>
       </pc:sldChg>
@@ -8495,17 +8563,7 @@
                 <a:latin typeface="Courier New" panose="02070309020205020404" pitchFamily="49" charset="0"/>
                 <a:cs typeface="Courier New" panose="02070309020205020404" pitchFamily="49" charset="0"/>
               </a:rPr>
-              <a:t>square</a:t>
-            </a:r>
-            <a:r>
-              <a:rPr lang="en-US" b="1" dirty="0">
-                <a:solidFill>
-                  <a:srgbClr val="006600"/>
-                </a:solidFill>
-                <a:latin typeface="Courier New" panose="02070309020205020404" pitchFamily="49" charset="0"/>
-                <a:cs typeface="Courier New" panose="02070309020205020404" pitchFamily="49" charset="0"/>
-              </a:rPr>
-              <a:t>(</a:t>
+              <a:t>square(</a:t>
             </a:r>
             <a:r>
               <a:rPr lang="en-US" b="1" dirty="0">
@@ -8581,7 +8639,7 @@
             <a:r>
               <a:rPr lang="en-US" b="1" dirty="0">
                 <a:solidFill>
-                  <a:srgbClr val="006600"/>
+                  <a:schemeClr val="tx1"/>
                 </a:solidFill>
                 <a:latin typeface="Courier New" panose="02070309020205020404" pitchFamily="49" charset="0"/>
                 <a:cs typeface="Courier New" panose="02070309020205020404" pitchFamily="49" charset="0"/>
@@ -12465,8 +12523,8 @@
         </p:nvSpPr>
         <p:spPr>
           <a:xfrm>
-            <a:off x="5588599" y="5024218"/>
-            <a:ext cx="3326802" cy="646331"/>
+            <a:off x="5476875" y="5024218"/>
+            <a:ext cx="3438526" cy="646331"/>
           </a:xfrm>
           <a:prstGeom prst="rect">
             <a:avLst/>
@@ -12502,7 +12560,7 @@
                   <a:schemeClr val="tx1"/>
                 </a:solidFill>
               </a:rPr>
-              <a:t>What do these line correspond to in the algorithm?</a:t>
+              <a:t>How do these lines correspond to the steps in the algorithm?</a:t>
             </a:r>
             <a:endParaRPr lang="en-US" dirty="0">
               <a:solidFill>
@@ -13486,7 +13544,7 @@
                   <a:schemeClr val="tx1"/>
                 </a:solidFill>
               </a:rPr>
-              <a:t>What do these line correspond to in the algorithm?</a:t>
+              <a:t>How do these lines correspond to the steps in the algorithm?</a:t>
             </a:r>
             <a:endParaRPr lang="en-US" dirty="0">
               <a:solidFill>
@@ -14514,7 +14572,7 @@
                   <a:schemeClr val="tx1"/>
                 </a:solidFill>
               </a:rPr>
-              <a:t>What do these line correspond to in the algorithm?</a:t>
+              <a:t>How do these lines correspond to the steps in the algorithm?</a:t>
             </a:r>
             <a:endParaRPr lang="en-US" dirty="0">
               <a:solidFill>
@@ -15331,7 +15389,7 @@
                   <a:schemeClr val="tx1"/>
                 </a:solidFill>
               </a:rPr>
-              <a:t>What do these line correspond to in the algorithm?</a:t>
+              <a:t>How do these lines correspond to the steps in the algorithm?</a:t>
             </a:r>
             <a:endParaRPr lang="en-US" dirty="0">
               <a:solidFill>
